--- a/classes/parte-8-blue-team-deteccion-y-soc/190-analisis-de-logs-de-windows-event-logs-y-sysmon/clase-190-presentacion.pptx
+++ b/classes/parte-8-blue-team-deteccion-y-soc/190-analisis-de-logs-de-windows-event-logs-y-sysmon/clase-190-presentacion.pptx
@@ -17,6 +17,11 @@
     <p:sldId id="265" r:id="rId16"/>
     <p:sldId id="266" r:id="rId17"/>
     <p:sldId id="267" r:id="rId18"/>
+    <p:sldId id="268" r:id="rId19"/>
+    <p:sldId id="269" r:id="rId20"/>
+    <p:sldId id="270" r:id="rId21"/>
+    <p:sldId id="271" r:id="rId22"/>
+    <p:sldId id="272" r:id="rId23"/>
   </p:sldIdLst>
   <p:sldSz cx="9144000" cy="6858000" type="screen4x3"/>
   <p:notesSz cx="6858000" cy="9144000"/>
@@ -3198,7 +3203,7 @@
                   <a:srgbClr val="0B3D2E"/>
                 </a:solidFill>
               </a:rPr>
-              <a:t>⚠️ Errores comunes</a:t>
+              <a:t>🧰 Herramientas y preparación</a:t>
             </a:r>
           </a:p>
         </p:txBody>
@@ -3236,67 +3241,67 @@
                   <a:srgbClr val="22282E"/>
                 </a:solidFill>
               </a:rPr>
-              <a:t>•  4688 sin línea de comandos — Falta habilitar "Include command line"; actívalo por GPO</a:t>
-            </a:r>
-          </a:p>
-          <a:p>
-            <a:pPr>
-              <a:spcAft>
-                <a:spcPts val="600"/>
-              </a:spcAft>
-            </a:pPr>
-            <a:r>
-              <a:rPr sz="1500">
-                <a:solidFill>
-                  <a:srgbClr val="22282E"/>
-                </a:solidFill>
-              </a:rPr>
-              <a:t>•  Sysmon genera ruido enorme — Config sin exclusiones; parte de una base afinada y filtra</a:t>
-            </a:r>
-          </a:p>
-          <a:p>
-            <a:pPr>
-              <a:spcAft>
-                <a:spcPts val="600"/>
-              </a:spcAft>
-            </a:pPr>
-            <a:r>
-              <a:rPr sz="1500">
-                <a:solidFill>
-                  <a:srgbClr val="22282E"/>
-                </a:solidFill>
-              </a:rPr>
-              <a:t>•  No aparece PowerShell 4104 — ScriptBlock logging desactivado; habilítalo por GPO</a:t>
-            </a:r>
-          </a:p>
-          <a:p>
-            <a:pPr>
-              <a:spcAft>
-                <a:spcPts val="600"/>
-              </a:spcAft>
-            </a:pPr>
-            <a:r>
-              <a:rPr sz="1500">
-                <a:solidFill>
-                  <a:srgbClr val="22282E"/>
-                </a:solidFill>
-              </a:rPr>
-              <a:t>•  CommandLine truncado en SIEM — Límite de campo; ajusta truncation en el forwarder/props</a:t>
-            </a:r>
-          </a:p>
-          <a:p>
-            <a:pPr>
-              <a:spcAft>
-                <a:spcPts val="600"/>
-              </a:spcAft>
-            </a:pPr>
-            <a:r>
-              <a:rPr sz="1500">
-                <a:solidFill>
-                  <a:srgbClr val="22282E"/>
-                </a:solidFill>
-              </a:rPr>
-              <a:t>•  Falsos positivos de tareas — Ventana de mantenimiento no excluida; añade filtro por horario/cuenta</a:t>
+              <a:t>•  Sysmon con una configuración base robusta (p. ej. la de SwiftOnSecurity o la de Olaf Hartong como punto de partida) adaptada a tu entorno.</a:t>
+            </a:r>
+          </a:p>
+          <a:p>
+            <a:pPr>
+              <a:spcAft>
+                <a:spcPts val="600"/>
+              </a:spcAft>
+            </a:pPr>
+            <a:r>
+              <a:rPr sz="1500">
+                <a:solidFill>
+                  <a:srgbClr val="22282E"/>
+                </a:solidFill>
+              </a:rPr>
+              <a:t>•  Directiva de auditoría de Windows para habilitar 4688 con línea de comandos y logon auditing.</a:t>
+            </a:r>
+          </a:p>
+          <a:p>
+            <a:pPr>
+              <a:spcAft>
+                <a:spcPts val="600"/>
+              </a:spcAft>
+            </a:pPr>
+            <a:r>
+              <a:rPr sz="1500">
+                <a:solidFill>
+                  <a:srgbClr val="22282E"/>
+                </a:solidFill>
+              </a:rPr>
+              <a:t>•  Módulo de PowerShell logging activado por GPO (ScriptBlock y Module Logging).</a:t>
+            </a:r>
+          </a:p>
+          <a:p>
+            <a:pPr>
+              <a:spcAft>
+                <a:spcPts val="600"/>
+              </a:spcAft>
+            </a:pPr>
+            <a:r>
+              <a:rPr sz="1500">
+                <a:solidFill>
+                  <a:srgbClr val="22282E"/>
+                </a:solidFill>
+              </a:rPr>
+              <a:t>•  Tu SIEM (clases 184/185) recibiendo estos canales vía Winlogbeat/Universal Forwarder.</a:t>
+            </a:r>
+          </a:p>
+          <a:p>
+            <a:pPr>
+              <a:spcAft>
+                <a:spcPts val="600"/>
+              </a:spcAft>
+            </a:pPr>
+            <a:r>
+              <a:rPr sz="1500">
+                <a:solidFill>
+                  <a:srgbClr val="22282E"/>
+                </a:solidFill>
+              </a:rPr>
+              <a:t>•  Practica en tu Windows de laboratorio; nunca en equipos ajenos.</a:t>
             </a:r>
           </a:p>
         </p:txBody>
@@ -3347,7 +3352,7 @@
                   <a:srgbClr val="0B3D2E"/>
                 </a:solidFill>
               </a:rPr>
-              <a:t>❓ Preguntas frecuentes</a:t>
+              <a:t>🧪 Laboratorio guiado — De evento a detección</a:t>
             </a:r>
           </a:p>
         </p:txBody>
@@ -3385,82 +3390,97 @@
                   <a:srgbClr val="22282E"/>
                 </a:solidFill>
               </a:rPr>
-              <a:t>•  ❓ ¿Sysmon o solo Event Logs nativos?</a:t>
-            </a:r>
-          </a:p>
-          <a:p>
-            <a:pPr>
-              <a:spcAft>
-                <a:spcPts val="600"/>
-              </a:spcAft>
-            </a:pPr>
-            <a:r>
-              <a:rPr sz="1500">
-                <a:solidFill>
-                  <a:srgbClr val="22282E"/>
-                </a:solidFill>
-              </a:rPr>
-              <a:t>•  Sysmon añade hash, linaje íntegro, conexiones por proceso y DNS. Los nativos aportan autenticación y auditoría. La combinación es el estándar de facto del blue team.</a:t>
-            </a:r>
-          </a:p>
-          <a:p>
-            <a:pPr>
-              <a:spcAft>
-                <a:spcPts val="600"/>
-              </a:spcAft>
-            </a:pPr>
-            <a:r>
-              <a:rPr sz="1500">
-                <a:solidFill>
-                  <a:srgbClr val="22282E"/>
-                </a:solidFill>
-              </a:rPr>
-              <a:t>•  ❓ ¿PowerShell logging captura scripts ofuscados?</a:t>
-            </a:r>
-          </a:p>
-          <a:p>
-            <a:pPr>
-              <a:spcAft>
-                <a:spcPts val="600"/>
-              </a:spcAft>
-            </a:pPr>
-            <a:r>
-              <a:rPr sz="1500">
-                <a:solidFill>
-                  <a:srgbClr val="22282E"/>
-                </a:solidFill>
-              </a:rPr>
-              <a:t>•  ScriptBlock (4104) registra el bloque tras des-ofuscar en muchos casos, revelando la intención real. Es una de las fuentes más valiosas contra ataques modernos.</a:t>
-            </a:r>
-          </a:p>
-          <a:p>
-            <a:pPr>
-              <a:spcAft>
-                <a:spcPts val="600"/>
-              </a:spcAft>
-            </a:pPr>
-            <a:r>
-              <a:rPr sz="1500">
-                <a:solidFill>
-                  <a:srgbClr val="22282E"/>
-                </a:solidFill>
-              </a:rPr>
-              <a:t>•  ❓ ¿Cómo evito que Sysmon sature el SIEM?</a:t>
-            </a:r>
-          </a:p>
-          <a:p>
-            <a:pPr>
-              <a:spcAft>
-                <a:spcPts val="600"/>
-              </a:spcAft>
-            </a:pPr>
-            <a:r>
-              <a:rPr sz="1500">
-                <a:solidFill>
-                  <a:srgbClr val="22282E"/>
-                </a:solidFill>
-              </a:rPr>
-              <a:t>•  Parte de una configuración comunitaria afinada, excluye procesos benignos ruidosos y prioriza los eventos con valor de detección (1, 3, 7, 11, 13, 22).</a:t>
+              <a:t>•  Habilita auditoría. Activa "Audit Process Creation" con inclusión de CommandLine (GPO: Include command line in process creation events).</a:t>
+            </a:r>
+          </a:p>
+          <a:p>
+            <a:pPr>
+              <a:spcAft>
+                <a:spcPts val="600"/>
+              </a:spcAft>
+            </a:pPr>
+            <a:r>
+              <a:rPr sz="1500">
+                <a:solidFill>
+                  <a:srgbClr val="22282E"/>
+                </a:solidFill>
+              </a:rPr>
+              <a:t>•  Despliega Sysmon. sysmon64.exe -accepteula -i config.xml. Verifica el canal Sysmon/Operational.</a:t>
+            </a:r>
+          </a:p>
+          <a:p>
+            <a:pPr>
+              <a:spcAft>
+                <a:spcPts val="600"/>
+              </a:spcAft>
+            </a:pPr>
+            <a:r>
+              <a:rPr sz="1500">
+                <a:solidFill>
+                  <a:srgbClr val="22282E"/>
+                </a:solidFill>
+              </a:rPr>
+              <a:t>•  Activa PowerShell logging. Por GPO habilita ScriptBlock (4104) y Module Logging (4103).</a:t>
+            </a:r>
+          </a:p>
+          <a:p>
+            <a:pPr>
+              <a:spcAft>
+                <a:spcPts val="600"/>
+              </a:spcAft>
+            </a:pPr>
+            <a:r>
+              <a:rPr sz="1500">
+                <a:solidFill>
+                  <a:srgbClr val="22282E"/>
+                </a:solidFill>
+              </a:rPr>
+              <a:t>•  Genera actividad. Ejecuta: un logon fallido repetido (4625), powershell -enc &lt;base64 benigno&gt; (4104), y schtasks /create benigno (4698).</a:t>
+            </a:r>
+          </a:p>
+          <a:p>
+            <a:pPr>
+              <a:spcAft>
+                <a:spcPts val="600"/>
+              </a:spcAft>
+            </a:pPr>
+            <a:r>
+              <a:rPr sz="1500">
+                <a:solidFill>
+                  <a:srgbClr val="22282E"/>
+                </a:solidFill>
+              </a:rPr>
+              <a:t>•  Detecta autenticación anómala. En el SIEM, cuenta 4625 por cuenta y Logon Type; alerta si hay ráfaga seguida de 4624.</a:t>
+            </a:r>
+          </a:p>
+          <a:p>
+            <a:pPr>
+              <a:spcAft>
+                <a:spcPts val="600"/>
+              </a:spcAft>
+            </a:pPr>
+            <a:r>
+              <a:rPr sz="1500">
+                <a:solidFill>
+                  <a:srgbClr val="22282E"/>
+                </a:solidFill>
+              </a:rPr>
+              <a:t>•  Detecta ejecución sospechosa. Busca Sysmon Event 1 con ParentImage de Office e Image de intérprete; correlaciona con Event 3 (conexión) del mismo proceso.</a:t>
+            </a:r>
+          </a:p>
+          <a:p>
+            <a:pPr>
+              <a:spcAft>
+                <a:spcPts val="600"/>
+              </a:spcAft>
+            </a:pPr>
+            <a:r>
+              <a:rPr sz="1500">
+                <a:solidFill>
+                  <a:srgbClr val="22282E"/>
+                </a:solidFill>
+              </a:rPr>
+              <a:t>•  Detecta PowerShell ofuscado. Sobre 4104, busca indicadores (FromBase64String, -enc, IEX, concatenaciones largas).</a:t>
             </a:r>
           </a:p>
         </p:txBody>
@@ -3511,7 +3531,7 @@
                   <a:srgbClr val="0B3D2E"/>
                 </a:solidFill>
               </a:rPr>
-              <a:t>🔗 Referencias</a:t>
+              <a:t>✍️ Ejercicios</a:t>
             </a:r>
           </a:p>
         </p:txBody>
@@ -3549,52 +3569,633 @@
                   <a:srgbClr val="22282E"/>
                 </a:solidFill>
               </a:rPr>
-              <a:t>•  Microsoft Sysmon — &lt;https://learn.microsoft.com/sysinternals/downloads/sysmon&gt;</a:t>
-            </a:r>
-          </a:p>
-          <a:p>
-            <a:pPr>
-              <a:spcAft>
-                <a:spcPts val="600"/>
-              </a:spcAft>
-            </a:pPr>
-            <a:r>
-              <a:rPr sz="1500">
-                <a:solidFill>
-                  <a:srgbClr val="22282E"/>
-                </a:solidFill>
-              </a:rPr>
-              <a:t>•  Windows Security Audit Events — &lt;https://learn.microsoft.com/windows/security/threat-protection/auditing/&gt;</a:t>
-            </a:r>
-          </a:p>
-          <a:p>
-            <a:pPr>
-              <a:spcAft>
-                <a:spcPts val="600"/>
-              </a:spcAft>
-            </a:pPr>
-            <a:r>
-              <a:rPr sz="1500">
-                <a:solidFill>
-                  <a:srgbClr val="22282E"/>
-                </a:solidFill>
-              </a:rPr>
-              <a:t>•  Olaf Hartong, sysmon-modular — &lt;https://github.com/olafhartong/sysmon-modular&gt;</a:t>
-            </a:r>
-          </a:p>
-          <a:p>
-            <a:pPr>
-              <a:spcAft>
-                <a:spcPts val="600"/>
-              </a:spcAft>
-            </a:pPr>
-            <a:r>
-              <a:rPr sz="1500">
-                <a:solidFill>
-                  <a:srgbClr val="22282E"/>
-                </a:solidFill>
-              </a:rPr>
-              <a:t>•  SwiftOnSecurity, sysmon-config — &lt;https://github.com/SwiftOnSecurity/sysmon-config&gt;</a:t>
+              <a:t>•  Mapea 8 Event IDs a su técnica ATT&amp;CK correspondiente.</a:t>
+            </a:r>
+          </a:p>
+          <a:p>
+            <a:pPr>
+              <a:spcAft>
+                <a:spcPts val="600"/>
+              </a:spcAft>
+            </a:pPr>
+            <a:r>
+              <a:rPr sz="1500">
+                <a:solidFill>
+                  <a:srgbClr val="22282E"/>
+                </a:solidFill>
+              </a:rPr>
+              <a:t>•  Explica los Logon Types 2, 3, 9 y 10 con un caso de uso de detección cada uno.</a:t>
+            </a:r>
+          </a:p>
+          <a:p>
+            <a:pPr>
+              <a:spcAft>
+                <a:spcPts val="600"/>
+              </a:spcAft>
+            </a:pPr>
+            <a:r>
+              <a:rPr sz="1500">
+                <a:solidFill>
+                  <a:srgbClr val="22282E"/>
+                </a:solidFill>
+              </a:rPr>
+              <a:t>•  Afinar una config de Sysmon para excluir un proceso ruidoso legítimo.</a:t>
+            </a:r>
+          </a:p>
+          <a:p>
+            <a:pPr>
+              <a:spcAft>
+                <a:spcPts val="600"/>
+              </a:spcAft>
+            </a:pPr>
+            <a:r>
+              <a:rPr sz="1500">
+                <a:solidFill>
+                  <a:srgbClr val="22282E"/>
+                </a:solidFill>
+              </a:rPr>
+              <a:t>•  Escribe una detección de "PowerShell descargando y ejecutando" (IEX + Net.WebClient).</a:t>
+            </a:r>
+          </a:p>
+          <a:p>
+            <a:pPr>
+              <a:spcAft>
+                <a:spcPts val="600"/>
+              </a:spcAft>
+            </a:pPr>
+            <a:r>
+              <a:rPr sz="1500">
+                <a:solidFill>
+                  <a:srgbClr val="22282E"/>
+                </a:solidFill>
+              </a:rPr>
+              <a:t>•  Diferencia 4688 y Sysmon 1: ¿qué aporta cada uno?</a:t>
+            </a:r>
+          </a:p>
+          <a:p>
+            <a:pPr>
+              <a:spcAft>
+                <a:spcPts val="600"/>
+              </a:spcAft>
+            </a:pPr>
+            <a:r>
+              <a:rPr sz="1500">
+                <a:solidFill>
+                  <a:srgbClr val="22282E"/>
+                </a:solidFill>
+              </a:rPr>
+              <a:t>•  Crea una regla para creación de cuenta local sospechosa (4720).</a:t>
+            </a:r>
+          </a:p>
+        </p:txBody>
+      </p:sp>
+    </p:spTree>
+  </p:cSld>
+  <p:clrMapOvr>
+    <a:masterClrMapping/>
+  </p:clrMapOvr>
+</p:sld>
+</file>
+
+<file path=ppt/slides/slide13.xml><?xml version="1.0" encoding="utf-8"?>
+<p:sld xmlns:a="http://schemas.openxmlformats.org/drawingml/2006/main" xmlns:p="http://schemas.openxmlformats.org/presentationml/2006/main" xmlns:r="http://schemas.openxmlformats.org/officeDocument/2006/relationships">
+  <p:cSld>
+    <p:spTree>
+      <p:nvGrpSpPr>
+        <p:cNvPr id="1" name=""/>
+        <p:cNvGrpSpPr/>
+        <p:nvPr/>
+      </p:nvGrpSpPr>
+      <p:grpSpPr/>
+      <p:sp>
+        <p:nvSpPr>
+          <p:cNvPr id="2" name="TextBox 1"/>
+          <p:cNvSpPr txBox="1"/>
+          <p:nvPr/>
+        </p:nvSpPr>
+        <p:spPr>
+          <a:xfrm>
+            <a:off x="457200" y="320040"/>
+            <a:ext cx="8229600" cy="822960"/>
+          </a:xfrm>
+          <a:prstGeom prst="rect">
+            <a:avLst/>
+          </a:prstGeom>
+          <a:noFill/>
+        </p:spPr>
+        <p:txBody>
+          <a:bodyPr wrap="square">
+            <a:spAutoFit/>
+          </a:bodyPr>
+          <a:lstStyle/>
+          <a:p>
+            <a:r>
+              <a:rPr sz="2600" b="1">
+                <a:solidFill>
+                  <a:srgbClr val="0B3D2E"/>
+                </a:solidFill>
+              </a:rPr>
+              <a:t>📝 Reto verificable</a:t>
+            </a:r>
+          </a:p>
+        </p:txBody>
+      </p:sp>
+      <p:sp>
+        <p:nvSpPr>
+          <p:cNvPr id="3" name="TextBox 2"/>
+          <p:cNvSpPr txBox="1"/>
+          <p:nvPr/>
+        </p:nvSpPr>
+        <p:spPr>
+          <a:xfrm>
+            <a:off x="457200" y="1280160"/>
+            <a:ext cx="8229600" cy="4937760"/>
+          </a:xfrm>
+          <a:prstGeom prst="rect">
+            <a:avLst/>
+          </a:prstGeom>
+          <a:noFill/>
+        </p:spPr>
+        <p:txBody>
+          <a:bodyPr wrap="square">
+            <a:spAutoFit/>
+          </a:bodyPr>
+          <a:lstStyle/>
+          <a:p>
+            <a:pPr>
+              <a:spcAft>
+                <a:spcPts val="600"/>
+              </a:spcAft>
+            </a:pPr>
+            <a:r>
+              <a:rPr sz="1500">
+                <a:solidFill>
+                  <a:srgbClr val="22282E"/>
+                </a:solidFill>
+              </a:rPr>
+              <a:t>•  Entrega tres detecciones basadas en Event Logs/Sysmon (autenticación, ejecución y persistencia) probadas en tu laboratorio, cada una con su Event ID, lógica y técnica ATT&amp;CK. Criterio de aceptación…</a:t>
+            </a:r>
+          </a:p>
+        </p:txBody>
+      </p:sp>
+    </p:spTree>
+  </p:cSld>
+  <p:clrMapOvr>
+    <a:masterClrMapping/>
+  </p:clrMapOvr>
+</p:sld>
+</file>
+
+<file path=ppt/slides/slide14.xml><?xml version="1.0" encoding="utf-8"?>
+<p:sld xmlns:a="http://schemas.openxmlformats.org/drawingml/2006/main" xmlns:p="http://schemas.openxmlformats.org/presentationml/2006/main" xmlns:r="http://schemas.openxmlformats.org/officeDocument/2006/relationships">
+  <p:cSld>
+    <p:spTree>
+      <p:nvGrpSpPr>
+        <p:cNvPr id="1" name=""/>
+        <p:cNvGrpSpPr/>
+        <p:nvPr/>
+      </p:nvGrpSpPr>
+      <p:grpSpPr/>
+      <p:sp>
+        <p:nvSpPr>
+          <p:cNvPr id="2" name="TextBox 1"/>
+          <p:cNvSpPr txBox="1"/>
+          <p:nvPr/>
+        </p:nvSpPr>
+        <p:spPr>
+          <a:xfrm>
+            <a:off x="457200" y="320040"/>
+            <a:ext cx="8229600" cy="822960"/>
+          </a:xfrm>
+          <a:prstGeom prst="rect">
+            <a:avLst/>
+          </a:prstGeom>
+          <a:noFill/>
+        </p:spPr>
+        <p:txBody>
+          <a:bodyPr wrap="square">
+            <a:spAutoFit/>
+          </a:bodyPr>
+          <a:lstStyle/>
+          <a:p>
+            <a:r>
+              <a:rPr sz="2600" b="1">
+                <a:solidFill>
+                  <a:srgbClr val="0B3D2E"/>
+                </a:solidFill>
+              </a:rPr>
+              <a:t>⚠️ Errores comunes</a:t>
+            </a:r>
+          </a:p>
+        </p:txBody>
+      </p:sp>
+      <p:sp>
+        <p:nvSpPr>
+          <p:cNvPr id="3" name="TextBox 2"/>
+          <p:cNvSpPr txBox="1"/>
+          <p:nvPr/>
+        </p:nvSpPr>
+        <p:spPr>
+          <a:xfrm>
+            <a:off x="457200" y="1280160"/>
+            <a:ext cx="8229600" cy="4937760"/>
+          </a:xfrm>
+          <a:prstGeom prst="rect">
+            <a:avLst/>
+          </a:prstGeom>
+          <a:noFill/>
+        </p:spPr>
+        <p:txBody>
+          <a:bodyPr wrap="square">
+            <a:spAutoFit/>
+          </a:bodyPr>
+          <a:lstStyle/>
+          <a:p>
+            <a:pPr>
+              <a:spcAft>
+                <a:spcPts val="600"/>
+              </a:spcAft>
+            </a:pPr>
+            <a:r>
+              <a:rPr sz="1500">
+                <a:solidFill>
+                  <a:srgbClr val="22282E"/>
+                </a:solidFill>
+              </a:rPr>
+              <a:t>•  4688 sin línea de comandos — Falta habilitar "Include command line"; actívalo por GPO</a:t>
+            </a:r>
+          </a:p>
+          <a:p>
+            <a:pPr>
+              <a:spcAft>
+                <a:spcPts val="600"/>
+              </a:spcAft>
+            </a:pPr>
+            <a:r>
+              <a:rPr sz="1500">
+                <a:solidFill>
+                  <a:srgbClr val="22282E"/>
+                </a:solidFill>
+              </a:rPr>
+              <a:t>•  Sysmon genera ruido enorme — Config sin exclusiones; parte de una base afinada y filtra</a:t>
+            </a:r>
+          </a:p>
+          <a:p>
+            <a:pPr>
+              <a:spcAft>
+                <a:spcPts val="600"/>
+              </a:spcAft>
+            </a:pPr>
+            <a:r>
+              <a:rPr sz="1500">
+                <a:solidFill>
+                  <a:srgbClr val="22282E"/>
+                </a:solidFill>
+              </a:rPr>
+              <a:t>•  No aparece PowerShell 4104 — ScriptBlock logging desactivado; habilítalo por GPO</a:t>
+            </a:r>
+          </a:p>
+          <a:p>
+            <a:pPr>
+              <a:spcAft>
+                <a:spcPts val="600"/>
+              </a:spcAft>
+            </a:pPr>
+            <a:r>
+              <a:rPr sz="1500">
+                <a:solidFill>
+                  <a:srgbClr val="22282E"/>
+                </a:solidFill>
+              </a:rPr>
+              <a:t>•  CommandLine truncado en SIEM — Límite de campo; ajusta truncation en el forwarder/props</a:t>
+            </a:r>
+          </a:p>
+          <a:p>
+            <a:pPr>
+              <a:spcAft>
+                <a:spcPts val="600"/>
+              </a:spcAft>
+            </a:pPr>
+            <a:r>
+              <a:rPr sz="1500">
+                <a:solidFill>
+                  <a:srgbClr val="22282E"/>
+                </a:solidFill>
+              </a:rPr>
+              <a:t>•  Falsos positivos de tareas — Ventana de mantenimiento no excluida; añade filtro por horario/cuenta</a:t>
+            </a:r>
+          </a:p>
+        </p:txBody>
+      </p:sp>
+    </p:spTree>
+  </p:cSld>
+  <p:clrMapOvr>
+    <a:masterClrMapping/>
+  </p:clrMapOvr>
+</p:sld>
+</file>
+
+<file path=ppt/slides/slide15.xml><?xml version="1.0" encoding="utf-8"?>
+<p:sld xmlns:a="http://schemas.openxmlformats.org/drawingml/2006/main" xmlns:p="http://schemas.openxmlformats.org/presentationml/2006/main" xmlns:r="http://schemas.openxmlformats.org/officeDocument/2006/relationships">
+  <p:cSld>
+    <p:spTree>
+      <p:nvGrpSpPr>
+        <p:cNvPr id="1" name=""/>
+        <p:cNvGrpSpPr/>
+        <p:nvPr/>
+      </p:nvGrpSpPr>
+      <p:grpSpPr/>
+      <p:sp>
+        <p:nvSpPr>
+          <p:cNvPr id="2" name="TextBox 1"/>
+          <p:cNvSpPr txBox="1"/>
+          <p:nvPr/>
+        </p:nvSpPr>
+        <p:spPr>
+          <a:xfrm>
+            <a:off x="457200" y="320040"/>
+            <a:ext cx="8229600" cy="822960"/>
+          </a:xfrm>
+          <a:prstGeom prst="rect">
+            <a:avLst/>
+          </a:prstGeom>
+          <a:noFill/>
+        </p:spPr>
+        <p:txBody>
+          <a:bodyPr wrap="square">
+            <a:spAutoFit/>
+          </a:bodyPr>
+          <a:lstStyle/>
+          <a:p>
+            <a:r>
+              <a:rPr sz="2600" b="1">
+                <a:solidFill>
+                  <a:srgbClr val="0B3D2E"/>
+                </a:solidFill>
+              </a:rPr>
+              <a:t>❓ Preguntas frecuentes</a:t>
+            </a:r>
+          </a:p>
+        </p:txBody>
+      </p:sp>
+      <p:sp>
+        <p:nvSpPr>
+          <p:cNvPr id="3" name="TextBox 2"/>
+          <p:cNvSpPr txBox="1"/>
+          <p:nvPr/>
+        </p:nvSpPr>
+        <p:spPr>
+          <a:xfrm>
+            <a:off x="457200" y="1280160"/>
+            <a:ext cx="8229600" cy="4937760"/>
+          </a:xfrm>
+          <a:prstGeom prst="rect">
+            <a:avLst/>
+          </a:prstGeom>
+          <a:noFill/>
+        </p:spPr>
+        <p:txBody>
+          <a:bodyPr wrap="square">
+            <a:spAutoFit/>
+          </a:bodyPr>
+          <a:lstStyle/>
+          <a:p>
+            <a:pPr>
+              <a:spcAft>
+                <a:spcPts val="600"/>
+              </a:spcAft>
+            </a:pPr>
+            <a:r>
+              <a:rPr sz="1500">
+                <a:solidFill>
+                  <a:srgbClr val="22282E"/>
+                </a:solidFill>
+              </a:rPr>
+              <a:t>•  ❓ ¿Sysmon o solo Event Logs nativos?</a:t>
+            </a:r>
+          </a:p>
+          <a:p>
+            <a:pPr>
+              <a:spcAft>
+                <a:spcPts val="600"/>
+              </a:spcAft>
+            </a:pPr>
+            <a:r>
+              <a:rPr sz="1500">
+                <a:solidFill>
+                  <a:srgbClr val="22282E"/>
+                </a:solidFill>
+              </a:rPr>
+              <a:t>•  Sysmon puede añadir hashes, identificadores de proceso y telemetría de red/DNS según su configuración. Los eventos nativos aportan autenticación y auditoría que Sysmon no sustituye. Combinarlos…</a:t>
+            </a:r>
+          </a:p>
+          <a:p>
+            <a:pPr>
+              <a:spcAft>
+                <a:spcPts val="600"/>
+              </a:spcAft>
+            </a:pPr>
+            <a:r>
+              <a:rPr sz="1500">
+                <a:solidFill>
+                  <a:srgbClr val="22282E"/>
+                </a:solidFill>
+              </a:rPr>
+              <a:t>•  ❓ ¿PowerShell logging captura scripts ofuscados?</a:t>
+            </a:r>
+          </a:p>
+          <a:p>
+            <a:pPr>
+              <a:spcAft>
+                <a:spcPts val="600"/>
+              </a:spcAft>
+            </a:pPr>
+            <a:r>
+              <a:rPr sz="1500">
+                <a:solidFill>
+                  <a:srgbClr val="22282E"/>
+                </a:solidFill>
+              </a:rPr>
+              <a:t>•  ScriptBlock (4104) registra el bloque tras des-ofuscar en muchos casos, revelando la intención real. Es una de las fuentes más valiosas contra ataques modernos.</a:t>
+            </a:r>
+          </a:p>
+          <a:p>
+            <a:pPr>
+              <a:spcAft>
+                <a:spcPts val="600"/>
+              </a:spcAft>
+            </a:pPr>
+            <a:r>
+              <a:rPr sz="1500">
+                <a:solidFill>
+                  <a:srgbClr val="22282E"/>
+                </a:solidFill>
+              </a:rPr>
+              <a:t>•  ❓ ¿Cómo evito que Sysmon sature el SIEM?</a:t>
+            </a:r>
+          </a:p>
+          <a:p>
+            <a:pPr>
+              <a:spcAft>
+                <a:spcPts val="600"/>
+              </a:spcAft>
+            </a:pPr>
+            <a:r>
+              <a:rPr sz="1500">
+                <a:solidFill>
+                  <a:srgbClr val="22282E"/>
+                </a:solidFill>
+              </a:rPr>
+              <a:t>•  Parte de una configuración comunitaria afinada, excluye procesos benignos ruidosos y prioriza los eventos con valor de detección (1, 3, 7, 11, 13, 22).</a:t>
+            </a:r>
+          </a:p>
+        </p:txBody>
+      </p:sp>
+    </p:spTree>
+  </p:cSld>
+  <p:clrMapOvr>
+    <a:masterClrMapping/>
+  </p:clrMapOvr>
+</p:sld>
+</file>
+
+<file path=ppt/slides/slide16.xml><?xml version="1.0" encoding="utf-8"?>
+<p:sld xmlns:a="http://schemas.openxmlformats.org/drawingml/2006/main" xmlns:p="http://schemas.openxmlformats.org/presentationml/2006/main" xmlns:r="http://schemas.openxmlformats.org/officeDocument/2006/relationships">
+  <p:cSld>
+    <p:spTree>
+      <p:nvGrpSpPr>
+        <p:cNvPr id="1" name=""/>
+        <p:cNvGrpSpPr/>
+        <p:nvPr/>
+      </p:nvGrpSpPr>
+      <p:grpSpPr/>
+      <p:sp>
+        <p:nvSpPr>
+          <p:cNvPr id="2" name="TextBox 1"/>
+          <p:cNvSpPr txBox="1"/>
+          <p:nvPr/>
+        </p:nvSpPr>
+        <p:spPr>
+          <a:xfrm>
+            <a:off x="457200" y="320040"/>
+            <a:ext cx="8229600" cy="822960"/>
+          </a:xfrm>
+          <a:prstGeom prst="rect">
+            <a:avLst/>
+          </a:prstGeom>
+          <a:noFill/>
+        </p:spPr>
+        <p:txBody>
+          <a:bodyPr wrap="square">
+            <a:spAutoFit/>
+          </a:bodyPr>
+          <a:lstStyle/>
+          <a:p>
+            <a:r>
+              <a:rPr sz="2600" b="1">
+                <a:solidFill>
+                  <a:srgbClr val="0B3D2E"/>
+                </a:solidFill>
+              </a:rPr>
+              <a:t>🔗 Referencias verificables y alcance</a:t>
+            </a:r>
+          </a:p>
+        </p:txBody>
+      </p:sp>
+      <p:sp>
+        <p:nvSpPr>
+          <p:cNvPr id="3" name="TextBox 2"/>
+          <p:cNvSpPr txBox="1"/>
+          <p:nvPr/>
+        </p:nvSpPr>
+        <p:spPr>
+          <a:xfrm>
+            <a:off x="457200" y="1280160"/>
+            <a:ext cx="8229600" cy="4937760"/>
+          </a:xfrm>
+          <a:prstGeom prst="rect">
+            <a:avLst/>
+          </a:prstGeom>
+          <a:noFill/>
+        </p:spPr>
+        <p:txBody>
+          <a:bodyPr wrap="square">
+            <a:spAutoFit/>
+          </a:bodyPr>
+          <a:lstStyle/>
+          <a:p>
+            <a:pPr>
+              <a:spcAft>
+                <a:spcPts val="600"/>
+              </a:spcAft>
+            </a:pPr>
+            <a:r>
+              <a:rPr sz="1500">
+                <a:solidFill>
+                  <a:srgbClr val="22282E"/>
+                </a:solidFill>
+              </a:rPr>
+              <a:t>•  Microsoft Sysmon: documentación oficial de instalación y configuración; explica que ciertos tipos de evento, como conexiones de red, pueden estar deshabilitados por defecto —…</a:t>
+            </a:r>
+          </a:p>
+          <a:p>
+            <a:pPr>
+              <a:spcAft>
+                <a:spcPts val="600"/>
+              </a:spcAft>
+            </a:pPr>
+            <a:r>
+              <a:rPr sz="1500">
+                <a:solidFill>
+                  <a:srgbClr val="22282E"/>
+                </a:solidFill>
+              </a:rPr>
+              <a:t>•  Microsoft, eventos Sysmon: referencia oficial de IDs, campos y semántica; ProcessGuid permite correlacionar instancias de proceso —…</a:t>
+            </a:r>
+          </a:p>
+          <a:p>
+            <a:pPr>
+              <a:spcAft>
+                <a:spcPts val="600"/>
+              </a:spcAft>
+            </a:pPr>
+            <a:r>
+              <a:rPr sz="1500">
+                <a:solidFill>
+                  <a:srgbClr val="22282E"/>
+                </a:solidFill>
+              </a:rPr>
+              <a:t>•  Microsoft, logging de PowerShell: documentación oficial de los mecanismos y canales de registro de PowerShell en Windows —…</a:t>
+            </a:r>
+          </a:p>
+          <a:p>
+            <a:pPr>
+              <a:spcAft>
+                <a:spcPts val="600"/>
+              </a:spcAft>
+            </a:pPr>
+            <a:r>
+              <a:rPr sz="1500">
+                <a:solidFill>
+                  <a:srgbClr val="22282E"/>
+                </a:solidFill>
+              </a:rPr>
+              <a:t>•  Microsoft, auditoría de seguridad de Windows: documentación oficial para políticas y eventos nativos; la disponibilidad depende de la política aplicada —…</a:t>
+            </a:r>
+          </a:p>
+          <a:p>
+            <a:pPr>
+              <a:spcAft>
+                <a:spcPts val="600"/>
+              </a:spcAft>
+            </a:pPr>
+            <a:r>
+              <a:rPr sz="1500">
+                <a:solidFill>
+                  <a:srgbClr val="22282E"/>
+                </a:solidFill>
+              </a:rPr>
+              <a:t>•  sysmon-modular y sysmon-config: configuraciones comunitarias para estudiar decisiones de inclusión/exclusión; no son baselines universales ni sustituyen pruebas de volumen —…</a:t>
             </a:r>
           </a:p>
           <a:p>
@@ -3614,6 +4215,81 @@
           </a:p>
         </p:txBody>
       </p:sp>
+    </p:spTree>
+  </p:cSld>
+  <p:clrMapOvr>
+    <a:masterClrMapping/>
+  </p:clrMapOvr>
+</p:sld>
+</file>
+
+<file path=ppt/slides/slide17.xml><?xml version="1.0" encoding="utf-8"?>
+<p:sld xmlns:a="http://schemas.openxmlformats.org/drawingml/2006/main" xmlns:p="http://schemas.openxmlformats.org/presentationml/2006/main" xmlns:r="http://schemas.openxmlformats.org/officeDocument/2006/relationships">
+  <p:cSld>
+    <p:spTree>
+      <p:nvGrpSpPr>
+        <p:cNvPr id="1" name=""/>
+        <p:cNvGrpSpPr/>
+        <p:nvPr/>
+      </p:nvGrpSpPr>
+      <p:grpSpPr/>
+      <p:sp>
+        <p:nvSpPr>
+          <p:cNvPr id="2" name="TextBox 1"/>
+          <p:cNvSpPr txBox="1"/>
+          <p:nvPr/>
+        </p:nvSpPr>
+        <p:spPr>
+          <a:xfrm>
+            <a:off x="457200" y="274320"/>
+            <a:ext cx="8229600" cy="640080"/>
+          </a:xfrm>
+          <a:prstGeom prst="rect">
+            <a:avLst/>
+          </a:prstGeom>
+          <a:noFill/>
+        </p:spPr>
+        <p:txBody>
+          <a:bodyPr wrap="square">
+            <a:spAutoFit/>
+          </a:bodyPr>
+          <a:lstStyle/>
+          <a:p>
+            <a:r>
+              <a:rPr sz="2200" b="1">
+                <a:solidFill>
+                  <a:srgbClr val="0B3D2E"/>
+                </a:solidFill>
+              </a:rPr>
+              <a:t>Diagrama de la clase</a:t>
+            </a:r>
+          </a:p>
+        </p:txBody>
+      </p:sp>
+      <p:pic>
+        <p:nvPicPr>
+          <p:cNvPr id="3" name="Picture 2" descr="fd117101910cebe0.png"/>
+          <p:cNvPicPr>
+            <a:picLocks noChangeAspect="1"/>
+          </p:cNvPicPr>
+          <p:nvPr/>
+        </p:nvPicPr>
+        <p:blipFill>
+          <a:blip r:embed="rId2"/>
+          <a:stretch>
+            <a:fillRect/>
+          </a:stretch>
+        </p:blipFill>
+        <p:spPr>
+          <a:xfrm>
+            <a:off x="457200" y="2862072"/>
+            <a:ext cx="8229600" cy="1773936"/>
+          </a:xfrm>
+          <a:prstGeom prst="rect">
+            <a:avLst/>
+          </a:prstGeom>
+        </p:spPr>
+      </p:pic>
     </p:spTree>
   </p:cSld>
   <p:clrMapOvr>
@@ -3698,7 +4374,7 @@
                   <a:srgbClr val="22282E"/>
                 </a:solidFill>
               </a:rPr>
-              <a:t>•  Dominar los Event Logs nativos de Windows y Sysmon como fuente central de detección de endpoint. Aprenderás qué Event IDs importan, cómo desplegar y afinar una configuración de Sysmon, y cómo construir detecciones sobre creación de procesos, línea de comandos, conexiones de red, carga de DLLs y manipulación de registro.</a:t>
+              <a:t>•  Dominar los Event Logs nativos de Windows y Sysmon como fuente central de detección de endpoint. Aprenderás qué Event IDs importan, cómo desplegar y afinar una configuración de Sysmon, y cómo…</a:t>
             </a:r>
           </a:p>
         </p:txBody>
@@ -4092,7 +4768,7 @@
                   <a:srgbClr val="0B3D2E"/>
                 </a:solidFill>
               </a:rPr>
-              <a:t>📖 Definiciones y características</a:t>
+              <a:t>🧠 Explicación en profundidad</a:t>
             </a:r>
           </a:p>
         </p:txBody>
@@ -4130,97 +4806,97 @@
                   <a:srgbClr val="22282E"/>
                 </a:solidFill>
               </a:rPr>
-              <a:t>•  Event ID 4624/4625: logon exitoso/fallido. Característica: incluye Logon Type (2 interactivo, 3 red, 10 RDP) clave para el contexto.</a:t>
-            </a:r>
-          </a:p>
-          <a:p>
-            <a:pPr>
-              <a:spcAft>
-                <a:spcPts val="600"/>
-              </a:spcAft>
-            </a:pPr>
-            <a:r>
-              <a:rPr sz="1500">
-                <a:solidFill>
-                  <a:srgbClr val="22282E"/>
-                </a:solidFill>
-              </a:rPr>
-              <a:t>•  Event ID 4688: creación de proceso nativa. Característica: con auditoría de línea de comandos habilitada, registra el CommandLine.</a:t>
-            </a:r>
-          </a:p>
-          <a:p>
-            <a:pPr>
-              <a:spcAft>
-                <a:spcPts val="600"/>
-              </a:spcAft>
-            </a:pPr>
-            <a:r>
-              <a:rPr sz="1500">
-                <a:solidFill>
-                  <a:srgbClr val="22282E"/>
-                </a:solidFill>
-              </a:rPr>
-              <a:t>•  Sysmon Event 1 (Process Create): creación de proceso con hash, línea de comandos, proceso padre. Característica: más rico que 4688 y con integridad de linaje.</a:t>
-            </a:r>
-          </a:p>
-          <a:p>
-            <a:pPr>
-              <a:spcAft>
-                <a:spcPts val="600"/>
-              </a:spcAft>
-            </a:pPr>
-            <a:r>
-              <a:rPr sz="1500">
-                <a:solidFill>
-                  <a:srgbClr val="22282E"/>
-                </a:solidFill>
-              </a:rPr>
-              <a:t>•  Sysmon Event 3 (Network Connection): conexión de red por proceso. Característica: asocia tráfico saliente al binario responsable.</a:t>
-            </a:r>
-          </a:p>
-          <a:p>
-            <a:pPr>
-              <a:spcAft>
-                <a:spcPts val="600"/>
-              </a:spcAft>
-            </a:pPr>
-            <a:r>
-              <a:rPr sz="1500">
-                <a:solidFill>
-                  <a:srgbClr val="22282E"/>
-                </a:solidFill>
-              </a:rPr>
-              <a:t>•  Sysmon Event 11/12/13: creación de archivo y cambios de registro. Característica: detecta persistencia y drops.</a:t>
-            </a:r>
-          </a:p>
-          <a:p>
-            <a:pPr>
-              <a:spcAft>
-                <a:spcPts val="600"/>
-              </a:spcAft>
-            </a:pPr>
-            <a:r>
-              <a:rPr sz="1500">
-                <a:solidFill>
-                  <a:srgbClr val="22282E"/>
-                </a:solidFill>
-              </a:rPr>
-              <a:t>•  Sysmon Event 22 (DNS Query): consulta DNS por proceso. Característica: base para detectar C2/DGA.</a:t>
-            </a:r>
-          </a:p>
-          <a:p>
-            <a:pPr>
-              <a:spcAft>
-                <a:spcPts val="600"/>
-              </a:spcAft>
-            </a:pPr>
-            <a:r>
-              <a:rPr sz="1500">
-                <a:solidFill>
-                  <a:srgbClr val="22282E"/>
-                </a:solidFill>
-              </a:rPr>
-              <a:t>•  PowerShell 4104 (ScriptBlock): registra el bloque de script ejecutado, incluso ofuscado tras des-ofuscar. Característica: visibilidad crítica de ejecución.</a:t>
+              <a:t>•  Un Event ID de Windows solo tiene significado junto con proveedor, canal, versión y política habilitada. El 4688 depende de auditoría de creación de procesos; Sysmon Event 1 añade hashes y…</a:t>
+            </a:r>
+          </a:p>
+          <a:p>
+            <a:pPr>
+              <a:spcAft>
+                <a:spcPts val="600"/>
+              </a:spcAft>
+            </a:pPr>
+            <a:r>
+              <a:rPr sz="1500">
+                <a:solidFill>
+                  <a:srgbClr val="22282E"/>
+                </a:solidFill>
+              </a:rPr>
+              <a:t>•  Un 4624 significa autenticación exitosa, no intrusión. Tipo de logon, cuenta, origen y eventos relacionados determinan si representa consola, red, servicio o sesión remota. La autenticación puede…</a:t>
+            </a:r>
+          </a:p>
+          <a:p>
+            <a:pPr>
+              <a:spcAft>
+                <a:spcPts val="600"/>
+              </a:spcAft>
+            </a:pPr>
+            <a:r>
+              <a:rPr sz="1500">
+                <a:solidFill>
+                  <a:srgbClr val="22282E"/>
+                </a:solidFill>
+              </a:rPr>
+              <a:t>•  Provider y canal delimitan el significado del ID. Un 1 de Sysmon no es el 1 de otro proveedor. En Security, la política efectiva determina si el evento existe y ciertos campos requieren opciones…</a:t>
+            </a:r>
+          </a:p>
+          <a:p>
+            <a:pPr>
+              <a:spcAft>
+                <a:spcPts val="600"/>
+              </a:spcAft>
+            </a:pPr>
+            <a:r>
+              <a:rPr sz="1500">
+                <a:solidFill>
+                  <a:srgbClr val="22282E"/>
+                </a:solidFill>
+              </a:rPr>
+              <a:t>•  Para RDP, 4624 ofrece un punto de partida, pero se relaciona con tipo de logon, origen, eventos de sesión y actividad posterior. La validación de credenciales puede estar en un controlador de dominio…</a:t>
+            </a:r>
+          </a:p>
+          <a:p>
+            <a:pPr>
+              <a:spcAft>
+                <a:spcPts val="600"/>
+              </a:spcAft>
+            </a:pPr>
+            <a:r>
+              <a:rPr sz="1500">
+                <a:solidFill>
+                  <a:srgbClr val="22282E"/>
+                </a:solidFill>
+              </a:rPr>
+              <a:t>•  Ambos describen creación de procesos desde perspectivas diferentes. 4688 pertenece a auditoría nativa y su línea de comandos depende de política; Sysmon 1 puede aportar ProcessGuid, hashes y padre…</a:t>
+            </a:r>
+          </a:p>
+          <a:p>
+            <a:pPr>
+              <a:spcAft>
+                <a:spcPts val="600"/>
+              </a:spcAft>
+            </a:pPr>
+            <a:r>
+              <a:rPr sz="1500">
+                <a:solidFill>
+                  <a:srgbClr val="22282E"/>
+                </a:solidFill>
+              </a:rPr>
+              <a:t>•  Sysmon Event 3 conecta proceso y red, pero suele filtrarse por volumen; Event 22 asocia DNS a proceso, sin demostrar conexión posterior. Eventos 11 y 13 aportan archivo y registro. Una correlación…</a:t>
+            </a:r>
+          </a:p>
+          <a:p>
+            <a:pPr>
+              <a:spcAft>
+                <a:spcPts val="600"/>
+              </a:spcAft>
+            </a:pPr>
+            <a:r>
+              <a:rPr sz="1500">
+                <a:solidFill>
+                  <a:srgbClr val="22282E"/>
+                </a:solidFill>
+              </a:rPr>
+              <a:t>•  Incluir todo puede afectar volumen y utilidad; excluir demasiado crea ceguera. Se parte de casos de uso, se mide una muestra y se revisan principales productores. Una exclusión se hace con atributos…</a:t>
             </a:r>
           </a:p>
         </p:txBody>
@@ -4271,7 +4947,7 @@
                   <a:srgbClr val="0B3D2E"/>
                 </a:solidFill>
               </a:rPr>
-              <a:t>🧰 Herramientas y preparación</a:t>
+              <a:t>📔 Glosario</a:t>
             </a:r>
           </a:p>
         </p:txBody>
@@ -4309,67 +4985,97 @@
                   <a:srgbClr val="22282E"/>
                 </a:solidFill>
               </a:rPr>
-              <a:t>•  Sysmon con una configuración base robusta (p. ej. la de SwiftOnSecurity o la de Olaf Hartong como punto de partida) adaptada a tu entorno.</a:t>
-            </a:r>
-          </a:p>
-          <a:p>
-            <a:pPr>
-              <a:spcAft>
-                <a:spcPts val="600"/>
-              </a:spcAft>
-            </a:pPr>
-            <a:r>
-              <a:rPr sz="1500">
-                <a:solidFill>
-                  <a:srgbClr val="22282E"/>
-                </a:solidFill>
-              </a:rPr>
-              <a:t>•  Directiva de auditoría de Windows para habilitar 4688 con línea de comandos y logon auditing.</a:t>
-            </a:r>
-          </a:p>
-          <a:p>
-            <a:pPr>
-              <a:spcAft>
-                <a:spcPts val="600"/>
-              </a:spcAft>
-            </a:pPr>
-            <a:r>
-              <a:rPr sz="1500">
-                <a:solidFill>
-                  <a:srgbClr val="22282E"/>
-                </a:solidFill>
-              </a:rPr>
-              <a:t>•  Módulo de PowerShell logging activado por GPO (ScriptBlock y Module Logging).</a:t>
-            </a:r>
-          </a:p>
-          <a:p>
-            <a:pPr>
-              <a:spcAft>
-                <a:spcPts val="600"/>
-              </a:spcAft>
-            </a:pPr>
-            <a:r>
-              <a:rPr sz="1500">
-                <a:solidFill>
-                  <a:srgbClr val="22282E"/>
-                </a:solidFill>
-              </a:rPr>
-              <a:t>•  Tu SIEM (clases 184/185) recibiendo estos canales vía Winlogbeat/Universal Forwarder.</a:t>
-            </a:r>
-          </a:p>
-          <a:p>
-            <a:pPr>
-              <a:spcAft>
-                <a:spcPts val="600"/>
-              </a:spcAft>
-            </a:pPr>
-            <a:r>
-              <a:rPr sz="1500">
-                <a:solidFill>
-                  <a:srgbClr val="22282E"/>
-                </a:solidFill>
-              </a:rPr>
-              <a:t>•  Practica en tu Windows de laboratorio; nunca en equipos ajenos.</a:t>
+              <a:t>•  Provider: componente que emite un evento.</a:t>
+            </a:r>
+          </a:p>
+          <a:p>
+            <a:pPr>
+              <a:spcAft>
+                <a:spcPts val="600"/>
+              </a:spcAft>
+            </a:pPr>
+            <a:r>
+              <a:rPr sz="1500">
+                <a:solidFill>
+                  <a:srgbClr val="22282E"/>
+                </a:solidFill>
+              </a:rPr>
+              <a:t>•  Channel: flujo lógico que guarda eventos.</a:t>
+            </a:r>
+          </a:p>
+          <a:p>
+            <a:pPr>
+              <a:spcAft>
+                <a:spcPts val="600"/>
+              </a:spcAft>
+            </a:pPr>
+            <a:r>
+              <a:rPr sz="1500">
+                <a:solidFill>
+                  <a:srgbClr val="22282E"/>
+                </a:solidFill>
+              </a:rPr>
+              <a:t>•  Audit Policy: configuración de categorías auditadas.</a:t>
+            </a:r>
+          </a:p>
+          <a:p>
+            <a:pPr>
+              <a:spcAft>
+                <a:spcPts val="600"/>
+              </a:spcAft>
+            </a:pPr>
+            <a:r>
+              <a:rPr sz="1500">
+                <a:solidFill>
+                  <a:srgbClr val="22282E"/>
+                </a:solidFill>
+              </a:rPr>
+              <a:t>•  Event ID: identificador local al proveedor.</a:t>
+            </a:r>
+          </a:p>
+          <a:p>
+            <a:pPr>
+              <a:spcAft>
+                <a:spcPts val="600"/>
+              </a:spcAft>
+            </a:pPr>
+            <a:r>
+              <a:rPr sz="1500">
+                <a:solidFill>
+                  <a:srgbClr val="22282E"/>
+                </a:solidFill>
+              </a:rPr>
+              <a:t>•  Logon type: clase de sesión autenticada.</a:t>
+            </a:r>
+          </a:p>
+          <a:p>
+            <a:pPr>
+              <a:spcAft>
+                <a:spcPts val="600"/>
+              </a:spcAft>
+            </a:pPr>
+            <a:r>
+              <a:rPr sz="1500">
+                <a:solidFill>
+                  <a:srgbClr val="22282E"/>
+                </a:solidFill>
+              </a:rPr>
+              <a:t>•  ProcessGuid: identificador estable de instancia en Sysmon.</a:t>
+            </a:r>
+          </a:p>
+          <a:p>
+            <a:pPr>
+              <a:spcAft>
+                <a:spcPts val="600"/>
+              </a:spcAft>
+            </a:pPr>
+            <a:r>
+              <a:rPr sz="1500">
+                <a:solidFill>
+                  <a:srgbClr val="22282E"/>
+                </a:solidFill>
+              </a:rPr>
+              <a:t>•  Correlación temporal: unión por entidad y ventana de tiempo.</a:t>
             </a:r>
           </a:p>
         </p:txBody>
@@ -4420,7 +5126,7 @@
                   <a:srgbClr val="0B3D2E"/>
                 </a:solidFill>
               </a:rPr>
-              <a:t>🧪 Laboratorio guiado — De evento a detección</a:t>
+              <a:t>📖 Definiciones y características</a:t>
             </a:r>
           </a:p>
         </p:txBody>
@@ -4458,97 +5164,97 @@
                   <a:srgbClr val="22282E"/>
                 </a:solidFill>
               </a:rPr>
-              <a:t>•  Habilita auditoría. Activa "Audit Process Creation" con inclusión de CommandLine (GPO: Include command line in process creation events).</a:t>
-            </a:r>
-          </a:p>
-          <a:p>
-            <a:pPr>
-              <a:spcAft>
-                <a:spcPts val="600"/>
-              </a:spcAft>
-            </a:pPr>
-            <a:r>
-              <a:rPr sz="1500">
-                <a:solidFill>
-                  <a:srgbClr val="22282E"/>
-                </a:solidFill>
-              </a:rPr>
-              <a:t>•  Despliega Sysmon. sysmon64.exe -accepteula -i config.xml. Verifica el canal Sysmon/Operational.</a:t>
-            </a:r>
-          </a:p>
-          <a:p>
-            <a:pPr>
-              <a:spcAft>
-                <a:spcPts val="600"/>
-              </a:spcAft>
-            </a:pPr>
-            <a:r>
-              <a:rPr sz="1500">
-                <a:solidFill>
-                  <a:srgbClr val="22282E"/>
-                </a:solidFill>
-              </a:rPr>
-              <a:t>•  Activa PowerShell logging. Por GPO habilita ScriptBlock (4104) y Module Logging (4103).</a:t>
-            </a:r>
-          </a:p>
-          <a:p>
-            <a:pPr>
-              <a:spcAft>
-                <a:spcPts val="600"/>
-              </a:spcAft>
-            </a:pPr>
-            <a:r>
-              <a:rPr sz="1500">
-                <a:solidFill>
-                  <a:srgbClr val="22282E"/>
-                </a:solidFill>
-              </a:rPr>
-              <a:t>•  Genera actividad. Ejecuta: un logon fallido repetido (4625), powershell -enc &lt;base64 benigno&gt; (4104), y schtasks /create benigno (4698).</a:t>
-            </a:r>
-          </a:p>
-          <a:p>
-            <a:pPr>
-              <a:spcAft>
-                <a:spcPts val="600"/>
-              </a:spcAft>
-            </a:pPr>
-            <a:r>
-              <a:rPr sz="1500">
-                <a:solidFill>
-                  <a:srgbClr val="22282E"/>
-                </a:solidFill>
-              </a:rPr>
-              <a:t>•  Detecta autenticación anómala. En el SIEM, cuenta 4625 por cuenta y Logon Type; alerta si hay ráfaga seguida de 4624.</a:t>
-            </a:r>
-          </a:p>
-          <a:p>
-            <a:pPr>
-              <a:spcAft>
-                <a:spcPts val="600"/>
-              </a:spcAft>
-            </a:pPr>
-            <a:r>
-              <a:rPr sz="1500">
-                <a:solidFill>
-                  <a:srgbClr val="22282E"/>
-                </a:solidFill>
-              </a:rPr>
-              <a:t>•  Detecta ejecución sospechosa. Busca Sysmon Event 1 con ParentImage de Office e Image de intérprete; correlaciona con Event 3 (conexión) del mismo proceso.</a:t>
-            </a:r>
-          </a:p>
-          <a:p>
-            <a:pPr>
-              <a:spcAft>
-                <a:spcPts val="600"/>
-              </a:spcAft>
-            </a:pPr>
-            <a:r>
-              <a:rPr sz="1500">
-                <a:solidFill>
-                  <a:srgbClr val="22282E"/>
-                </a:solidFill>
-              </a:rPr>
-              <a:t>•  Detecta PowerShell ofuscado. Sobre 4104, busca indicadores (FromBase64String, -enc, IEX, concatenaciones largas).</a:t>
+              <a:t>•  Event ID 4624/4625: logon exitoso/fallido. Característica: incluye Logon Type (2 interactivo, 3 red, 10 RDP) clave para el contexto.</a:t>
+            </a:r>
+          </a:p>
+          <a:p>
+            <a:pPr>
+              <a:spcAft>
+                <a:spcPts val="600"/>
+              </a:spcAft>
+            </a:pPr>
+            <a:r>
+              <a:rPr sz="1500">
+                <a:solidFill>
+                  <a:srgbClr val="22282E"/>
+                </a:solidFill>
+              </a:rPr>
+              <a:t>•  Event ID 4688: creación de proceso nativa. Característica: con auditoría de línea de comandos habilitada, registra el CommandLine.</a:t>
+            </a:r>
+          </a:p>
+          <a:p>
+            <a:pPr>
+              <a:spcAft>
+                <a:spcPts val="600"/>
+              </a:spcAft>
+            </a:pPr>
+            <a:r>
+              <a:rPr sz="1500">
+                <a:solidFill>
+                  <a:srgbClr val="22282E"/>
+                </a:solidFill>
+              </a:rPr>
+              <a:t>•  Sysmon Event 1 (Process Create): creación de proceso con hash, línea de comandos, proceso padre. Característica: más rico que 4688 y con integridad de linaje.</a:t>
+            </a:r>
+          </a:p>
+          <a:p>
+            <a:pPr>
+              <a:spcAft>
+                <a:spcPts val="600"/>
+              </a:spcAft>
+            </a:pPr>
+            <a:r>
+              <a:rPr sz="1500">
+                <a:solidFill>
+                  <a:srgbClr val="22282E"/>
+                </a:solidFill>
+              </a:rPr>
+              <a:t>•  Sysmon Event 3 (Network Connection): conexión de red por proceso. Característica: asocia tráfico saliente al binario responsable.</a:t>
+            </a:r>
+          </a:p>
+          <a:p>
+            <a:pPr>
+              <a:spcAft>
+                <a:spcPts val="600"/>
+              </a:spcAft>
+            </a:pPr>
+            <a:r>
+              <a:rPr sz="1500">
+                <a:solidFill>
+                  <a:srgbClr val="22282E"/>
+                </a:solidFill>
+              </a:rPr>
+              <a:t>•  Sysmon Event 11/12/13: creación de archivo y cambios de registro. Característica: detecta persistencia y drops.</a:t>
+            </a:r>
+          </a:p>
+          <a:p>
+            <a:pPr>
+              <a:spcAft>
+                <a:spcPts val="600"/>
+              </a:spcAft>
+            </a:pPr>
+            <a:r>
+              <a:rPr sz="1500">
+                <a:solidFill>
+                  <a:srgbClr val="22282E"/>
+                </a:solidFill>
+              </a:rPr>
+              <a:t>•  Sysmon Event 22 (DNS Query): consulta DNS por proceso. Característica: base para detectar C2/DGA.</a:t>
+            </a:r>
+          </a:p>
+          <a:p>
+            <a:pPr>
+              <a:spcAft>
+                <a:spcPts val="600"/>
+              </a:spcAft>
+            </a:pPr>
+            <a:r>
+              <a:rPr sz="1500">
+                <a:solidFill>
+                  <a:srgbClr val="22282E"/>
+                </a:solidFill>
+              </a:rPr>
+              <a:t>•  PowerShell 4104 (ScriptBlock): registra el bloque de script ejecutado, incluso ofuscado tras des-ofuscar. Característica: visibilidad crítica de ejecución.</a:t>
             </a:r>
           </a:p>
         </p:txBody>
@@ -4599,7 +5305,7 @@
                   <a:srgbClr val="0B3D2E"/>
                 </a:solidFill>
               </a:rPr>
-              <a:t>✍️ Ejercicios</a:t>
+              <a:t>🔍 Correlación resuelta — RDP y actividad posterior</a:t>
             </a:r>
           </a:p>
         </p:txBody>
@@ -4637,82 +5343,37 @@
                   <a:srgbClr val="22282E"/>
                 </a:solidFill>
               </a:rPr>
-              <a:t>•  Mapea 8 Event IDs a su técnica ATT&amp;CK correspondiente.</a:t>
-            </a:r>
-          </a:p>
-          <a:p>
-            <a:pPr>
-              <a:spcAft>
-                <a:spcPts val="600"/>
-              </a:spcAft>
-            </a:pPr>
-            <a:r>
-              <a:rPr sz="1500">
-                <a:solidFill>
-                  <a:srgbClr val="22282E"/>
-                </a:solidFill>
-              </a:rPr>
-              <a:t>•  Explica los Logon Types 2, 3, 9 y 10 con un caso de uso de detección cada uno.</a:t>
-            </a:r>
-          </a:p>
-          <a:p>
-            <a:pPr>
-              <a:spcAft>
-                <a:spcPts val="600"/>
-              </a:spcAft>
-            </a:pPr>
-            <a:r>
-              <a:rPr sz="1500">
-                <a:solidFill>
-                  <a:srgbClr val="22282E"/>
-                </a:solidFill>
-              </a:rPr>
-              <a:t>•  Afinar una config de Sysmon para excluir un proceso ruidoso legítimo.</a:t>
-            </a:r>
-          </a:p>
-          <a:p>
-            <a:pPr>
-              <a:spcAft>
-                <a:spcPts val="600"/>
-              </a:spcAft>
-            </a:pPr>
-            <a:r>
-              <a:rPr sz="1500">
-                <a:solidFill>
-                  <a:srgbClr val="22282E"/>
-                </a:solidFill>
-              </a:rPr>
-              <a:t>•  Escribe una detección de "PowerShell descargando y ejecutando" (IEX + Net.WebClient).</a:t>
-            </a:r>
-          </a:p>
-          <a:p>
-            <a:pPr>
-              <a:spcAft>
-                <a:spcPts val="600"/>
-              </a:spcAft>
-            </a:pPr>
-            <a:r>
-              <a:rPr sz="1500">
-                <a:solidFill>
-                  <a:srgbClr val="22282E"/>
-                </a:solidFill>
-              </a:rPr>
-              <a:t>•  Diferencia 4688 y Sysmon 1: ¿qué aporta cada uno?</a:t>
-            </a:r>
-          </a:p>
-          <a:p>
-            <a:pPr>
-              <a:spcAft>
-                <a:spcPts val="600"/>
-              </a:spcAft>
-            </a:pPr>
-            <a:r>
-              <a:rPr sz="1500">
-                <a:solidFill>
-                  <a:srgbClr val="22282E"/>
-                </a:solidFill>
-              </a:rPr>
-              <a:t>•  Crea una regla para creación de cuenta local sospechosa (4720).</a:t>
+              <a:t>•  Se genera una sesión RDP autorizada desde ADMIN-WS hacia SRV-LAB. En Security se identifica el 4624 con tipo de logon correspondiente y campos de origen disponibles; en el controlador se revisa…</a:t>
+            </a:r>
+          </a:p>
+          <a:p>
+            <a:pPr>
+              <a:spcAft>
+                <a:spcPts val="600"/>
+              </a:spcAft>
+            </a:pPr>
+            <a:r>
+              <a:rPr sz="1500">
+                <a:solidFill>
+                  <a:srgbClr val="22282E"/>
+                </a:solidFill>
+              </a:rPr>
+              <a:t>•  Luego se repite desde un origen no incluido en el grafo administrativo. La analítica no alerta solo por 4624: combina origen inesperado, cuenta y criticidad, y presenta procesos posteriores. Si la…</a:t>
+            </a:r>
+          </a:p>
+          <a:p>
+            <a:pPr>
+              <a:spcAft>
+                <a:spcPts val="600"/>
+              </a:spcAft>
+            </a:pPr>
+            <a:r>
+              <a:rPr sz="1500">
+                <a:solidFill>
+                  <a:srgbClr val="22282E"/>
+                </a:solidFill>
+              </a:rPr>
+              <a:t>•  La configuración se cambia para incluir un caso de uso y se mide volumen antes/después. Se guarda XML, hash y versión. Una exclusión comunitaria se revisa línea por línea; que funcione para otro…</a:t>
             </a:r>
           </a:p>
         </p:txBody>
@@ -4763,7 +5424,7 @@
                   <a:srgbClr val="0B3D2E"/>
                 </a:solidFill>
               </a:rPr>
-              <a:t>📝 Reto verificable</a:t>
+              <a:t>✅ Criterio de dominio</a:t>
             </a:r>
           </a:p>
         </p:txBody>
@@ -4801,7 +5462,7 @@
                   <a:srgbClr val="22282E"/>
                 </a:solidFill>
               </a:rPr>
-              <a:t>•  Entrega tres detecciones basadas en Event Logs/Sysmon (autenticación, ejecución y persistencia) probadas en tu laboratorio, cada una con su Event ID, lógica y técnica ATT&amp;CK. Criterio de aceptación: las tres disparan con la actividad que generas y no con la línea base; demuestras que capturas la línea de comandos completa (no truncada) del proceso sospechoso y su relación padre-hijo.</a:t>
+              <a:t>•  El alumno explica proveedor, canal, ID y política; correlaciona autenticación y proceso sin confundirlos; y demuestra con dos ejecuciones qué registra su configuración. Memorizar una tabla de Event…</a:t>
             </a:r>
           </a:p>
         </p:txBody>
